--- a/presentation/FraudLens_TetraPack.pptx
+++ b/presentation/FraudLens_TetraPack.pptx
@@ -1215,7 +1215,7 @@
           <a:p>
             <a:r>
               <a:rPr lang="en-US" dirty="0"/>
-              <a:t>The brief is FIR-ready, with evidence IDs and mapped legal sections, plus four concrete actions: freeze now, telecom requests, bank requests and field verification.</a:t>
+              <a:t>The brief is FIR-ready, with evidence IDs and mapped legal sections, plus a Sec 63 BSA certificate checklist.</a:t>
             </a:r>
             <a:endParaRPr lang="en-US" dirty="0"/>
           </a:p>
@@ -8187,8 +8187,8 @@
         </p:nvSpPr>
         <p:spPr>
           <a:xfrm>
-            <a:off x="548640" y="1554480"/>
-            <a:ext cx="4023360" cy="2743200"/>
+            <a:off x="1828800" y="1691640"/>
+            <a:ext cx="5486400" cy="2743200"/>
           </a:xfrm>
           <a:prstGeom prst="roundRect">
             <a:avLst>
@@ -8221,8 +8221,8 @@
         </p:nvSpPr>
         <p:spPr>
           <a:xfrm>
-            <a:off x="822960" y="1691640"/>
-            <a:ext cx="3474720" cy="365760"/>
+            <a:off x="2286000" y="1920240"/>
+            <a:ext cx="4572000" cy="457200"/>
           </a:xfrm>
           <a:prstGeom prst="rect">
             <a:avLst/>
@@ -8238,7 +8238,7 @@
               <a:buNone/>
             </a:pPr>
             <a:r>
-              <a:rPr lang="en-US" sz="2200" b="1" dirty="0">
+              <a:rPr lang="en-US" sz="2600" b="1" dirty="0">
                 <a:solidFill>
                   <a:srgbClr val="FFFFFF"/>
                 </a:solidFill>
@@ -8248,7 +8248,7 @@
               </a:rPr>
               <a:t>Case brief</a:t>
             </a:r>
-            <a:endParaRPr lang="en-US" sz="2200" dirty="0"/>
+            <a:endParaRPr lang="en-US" sz="2600" dirty="0"/>
           </a:p>
         </p:txBody>
       </p:sp>
@@ -8260,8 +8260,8 @@
         </p:nvSpPr>
         <p:spPr>
           <a:xfrm>
-            <a:off x="822960" y="2194560"/>
-            <a:ext cx="3566160" cy="2011680"/>
+            <a:off x="2286000" y="2560320"/>
+            <a:ext cx="4572000" cy="1737360"/>
           </a:xfrm>
           <a:prstGeom prst="rect">
             <a:avLst/>
@@ -8275,13 +8275,13 @@
           <a:p>
             <a:pPr marL="342900" indent="-342900">
               <a:spcAft>
-                <a:spcPts val="600"/>
+                <a:spcPts val="800"/>
               </a:spcAft>
               <a:buSzPct val="100000"/>
               <a:buChar char="•"/>
             </a:pPr>
             <a:r>
-              <a:rPr lang="en-US" sz="1400" dirty="0">
+              <a:rPr lang="en-US" sz="1700" dirty="0">
                 <a:solidFill>
                   <a:srgbClr val="E0EAFF"/>
                 </a:solidFill>
@@ -8291,18 +8291,18 @@
               </a:rPr>
               <a:t>Timeline and SIM-swap chain summary</a:t>
             </a:r>
-            <a:endParaRPr lang="en-US" sz="1400" dirty="0"/>
+            <a:endParaRPr lang="en-US" sz="1700" dirty="0"/>
           </a:p>
           <a:p>
             <a:pPr marL="342900" indent="-342900">
               <a:spcAft>
-                <a:spcPts val="600"/>
+                <a:spcPts val="800"/>
               </a:spcAft>
               <a:buSzPct val="100000"/>
               <a:buChar char="•"/>
             </a:pPr>
             <a:r>
-              <a:rPr lang="en-US" sz="1400" dirty="0">
+              <a:rPr lang="en-US" sz="1700" dirty="0">
                 <a:solidFill>
                   <a:srgbClr val="E0EAFF"/>
                 </a:solidFill>
@@ -8312,18 +8312,18 @@
               </a:rPr>
               <a:t>Evidence with IDs</a:t>
             </a:r>
-            <a:endParaRPr lang="en-US" sz="1400" dirty="0"/>
+            <a:endParaRPr lang="en-US" sz="1700" dirty="0"/>
           </a:p>
           <a:p>
             <a:pPr marL="342900" indent="-342900">
               <a:spcAft>
-                <a:spcPts val="600"/>
+                <a:spcPts val="800"/>
               </a:spcAft>
               <a:buSzPct val="100000"/>
               <a:buChar char="•"/>
             </a:pPr>
             <a:r>
-              <a:rPr lang="en-US" sz="1400" dirty="0">
+              <a:rPr lang="en-US" sz="1700" dirty="0">
                 <a:solidFill>
                   <a:srgbClr val="E0EAFF"/>
                 </a:solidFill>
@@ -8333,18 +8333,18 @@
               </a:rPr>
               <a:t>Hypotheses and contradictions</a:t>
             </a:r>
-            <a:endParaRPr lang="en-US" sz="1400" dirty="0"/>
+            <a:endParaRPr lang="en-US" sz="1700" dirty="0"/>
           </a:p>
           <a:p>
             <a:pPr marL="342900" indent="-342900">
               <a:spcAft>
-                <a:spcPts val="600"/>
+                <a:spcPts val="800"/>
               </a:spcAft>
               <a:buSzPct val="100000"/>
               <a:buChar char="•"/>
             </a:pPr>
             <a:r>
-              <a:rPr lang="en-US" sz="1400" dirty="0">
+              <a:rPr lang="en-US" sz="1700" dirty="0">
                 <a:solidFill>
                   <a:srgbClr val="E0EAFF"/>
                 </a:solidFill>
@@ -8354,18 +8354,18 @@
               </a:rPr>
               <a:t>Legal sections (IT Act 66C/66D, BNS)</a:t>
             </a:r>
-            <a:endParaRPr lang="en-US" sz="1400" dirty="0"/>
+            <a:endParaRPr lang="en-US" sz="1700" dirty="0"/>
           </a:p>
           <a:p>
             <a:pPr marL="342900" indent="-342900">
               <a:spcAft>
-                <a:spcPts val="600"/>
+                <a:spcPts val="800"/>
               </a:spcAft>
               <a:buSzPct val="100000"/>
               <a:buChar char="•"/>
             </a:pPr>
             <a:r>
-              <a:rPr lang="en-US" sz="1400" dirty="0">
+              <a:rPr lang="en-US" sz="1700" dirty="0">
                 <a:solidFill>
                   <a:srgbClr val="E0EAFF"/>
                 </a:solidFill>
@@ -8375,494 +8375,7 @@
               </a:rPr>
               <a:t>Sec 63 BSA certificate checklist</a:t>
             </a:r>
-            <a:endParaRPr lang="en-US" sz="1400" dirty="0"/>
-          </a:p>
-        </p:txBody>
-      </p:sp>
-      <p:sp>
-        <p:nvSpPr>
-          <p:cNvPr id="8" name="Shape 5"/>
-          <p:cNvSpPr/>
-          <p:nvPr/>
-        </p:nvSpPr>
-        <p:spPr>
-          <a:xfrm>
-            <a:off x="4846320" y="1554480"/>
-            <a:ext cx="1783080" cy="1280160"/>
-          </a:xfrm>
-          <a:prstGeom prst="roundRect">
-            <a:avLst>
-              <a:gd name="adj" fmla="val 7143"/>
-            </a:avLst>
-          </a:prstGeom>
-          <a:solidFill>
-            <a:srgbClr val="F59E0B"/>
-          </a:solidFill>
-          <a:ln w="12700">
-            <a:solidFill>
-              <a:srgbClr val="F59E0B"/>
-            </a:solidFill>
-            <a:prstDash val="solid"/>
-          </a:ln>
-          <a:effectLst>
-            <a:outerShdw sx="100000" sy="100000" kx="0" ky="0" algn="bl" rotWithShape="0" blurRad="101600" dist="25400" dir="5400000">
-              <a:srgbClr val="000000">
-                <a:alpha val="12000"/>
-              </a:srgbClr>
-            </a:outerShdw>
-          </a:effectLst>
-        </p:spPr>
-      </p:sp>
-      <p:sp>
-        <p:nvSpPr>
-          <p:cNvPr id="9" name="Text 6"/>
-          <p:cNvSpPr txBox="1"/>
-          <p:nvPr/>
-        </p:nvSpPr>
-        <p:spPr>
-          <a:xfrm>
-            <a:off x="4983480" y="1783080"/>
-            <a:ext cx="1554480" cy="457200"/>
-          </a:xfrm>
-          <a:prstGeom prst="rect">
-            <a:avLst/>
-          </a:prstGeom>
-          <a:noFill/>
-          <a:ln/>
-        </p:spPr>
-        <p:txBody>
-          <a:bodyPr wrap="square" lIns="0" tIns="0" rIns="0" bIns="0" rtlCol="0" anchor="t"/>
-          <a:lstStyle/>
-          <a:p>
-            <a:pPr indent="0" marL="0">
-              <a:buNone/>
-            </a:pPr>
-            <a:r>
-              <a:rPr lang="en-US" sz="1600" b="1" dirty="0">
-                <a:solidFill>
-                  <a:srgbClr val="0B1F3A"/>
-                </a:solidFill>
-                <a:latin typeface="Cambria" pitchFamily="34" charset="0"/>
-                <a:ea typeface="Cambria" pitchFamily="34" charset="-122"/>
-                <a:cs typeface="Cambria" pitchFamily="34" charset="-120"/>
-              </a:rPr>
-              <a:t>Freeze now</a:t>
-            </a:r>
-            <a:endParaRPr lang="en-US" sz="1600" dirty="0"/>
-          </a:p>
-        </p:txBody>
-      </p:sp>
-      <p:sp>
-        <p:nvSpPr>
-          <p:cNvPr id="10" name="Text 7"/>
-          <p:cNvSpPr txBox="1"/>
-          <p:nvPr/>
-        </p:nvSpPr>
-        <p:spPr>
-          <a:xfrm>
-            <a:off x="4983480" y="2331720"/>
-            <a:ext cx="1554480" cy="411480"/>
-          </a:xfrm>
-          <a:prstGeom prst="rect">
-            <a:avLst/>
-          </a:prstGeom>
-          <a:noFill/>
-          <a:ln/>
-        </p:spPr>
-        <p:txBody>
-          <a:bodyPr wrap="square" lIns="0" tIns="0" rIns="0" bIns="0" rtlCol="0" anchor="t"/>
-          <a:lstStyle/>
-          <a:p>
-            <a:pPr indent="0" marL="0">
-              <a:buNone/>
-            </a:pPr>
-            <a:r>
-              <a:rPr lang="en-US" sz="1200" dirty="0">
-                <a:solidFill>
-                  <a:srgbClr val="0B1F3A"/>
-                </a:solidFill>
-                <a:latin typeface="Calibri" pitchFamily="34" charset="0"/>
-                <a:ea typeface="Calibri" pitchFamily="34" charset="-122"/>
-                <a:cs typeface="Calibri" pitchFamily="34" charset="-120"/>
-              </a:rPr>
-              <a:t>Min-cut account set</a:t>
-            </a:r>
-            <a:endParaRPr lang="en-US" sz="1200" dirty="0"/>
-          </a:p>
-        </p:txBody>
-      </p:sp>
-      <p:sp>
-        <p:nvSpPr>
-          <p:cNvPr id="11" name="Shape 8"/>
-          <p:cNvSpPr/>
-          <p:nvPr/>
-        </p:nvSpPr>
-        <p:spPr>
-          <a:xfrm>
-            <a:off x="6766560" y="1554480"/>
-            <a:ext cx="1783080" cy="1280160"/>
-          </a:xfrm>
-          <a:prstGeom prst="roundRect">
-            <a:avLst>
-              <a:gd name="adj" fmla="val 7143"/>
-            </a:avLst>
-          </a:prstGeom>
-          <a:solidFill>
-            <a:srgbClr val="FFFFFF"/>
-          </a:solidFill>
-          <a:ln w="12700">
-            <a:solidFill>
-              <a:srgbClr val="FFFFFF"/>
-            </a:solidFill>
-            <a:prstDash val="solid"/>
-          </a:ln>
-          <a:effectLst>
-            <a:outerShdw sx="100000" sy="100000" kx="0" ky="0" algn="bl" rotWithShape="0" blurRad="101600" dist="25400" dir="5400000">
-              <a:srgbClr val="000000">
-                <a:alpha val="12000"/>
-              </a:srgbClr>
-            </a:outerShdw>
-          </a:effectLst>
-        </p:spPr>
-      </p:sp>
-      <p:sp>
-        <p:nvSpPr>
-          <p:cNvPr id="12" name="Text 9"/>
-          <p:cNvSpPr txBox="1"/>
-          <p:nvPr/>
-        </p:nvSpPr>
-        <p:spPr>
-          <a:xfrm>
-            <a:off x="6903720" y="1783080"/>
-            <a:ext cx="1554480" cy="457200"/>
-          </a:xfrm>
-          <a:prstGeom prst="rect">
-            <a:avLst/>
-          </a:prstGeom>
-          <a:noFill/>
-          <a:ln/>
-        </p:spPr>
-        <p:txBody>
-          <a:bodyPr wrap="square" lIns="0" tIns="0" rIns="0" bIns="0" rtlCol="0" anchor="t"/>
-          <a:lstStyle/>
-          <a:p>
-            <a:pPr indent="0" marL="0">
-              <a:buNone/>
-            </a:pPr>
-            <a:r>
-              <a:rPr lang="en-US" sz="1600" b="1" dirty="0">
-                <a:solidFill>
-                  <a:srgbClr val="0B1F3A"/>
-                </a:solidFill>
-                <a:latin typeface="Cambria" pitchFamily="34" charset="0"/>
-                <a:ea typeface="Cambria" pitchFamily="34" charset="-122"/>
-                <a:cs typeface="Cambria" pitchFamily="34" charset="-120"/>
-              </a:rPr>
-              <a:t>Telecom requests</a:t>
-            </a:r>
-            <a:endParaRPr lang="en-US" sz="1600" dirty="0"/>
-          </a:p>
-        </p:txBody>
-      </p:sp>
-      <p:sp>
-        <p:nvSpPr>
-          <p:cNvPr id="13" name="Text 10"/>
-          <p:cNvSpPr txBox="1"/>
-          <p:nvPr/>
-        </p:nvSpPr>
-        <p:spPr>
-          <a:xfrm>
-            <a:off x="6903720" y="2331720"/>
-            <a:ext cx="1554480" cy="411480"/>
-          </a:xfrm>
-          <a:prstGeom prst="rect">
-            <a:avLst/>
-          </a:prstGeom>
-          <a:noFill/>
-          <a:ln/>
-        </p:spPr>
-        <p:txBody>
-          <a:bodyPr wrap="square" lIns="0" tIns="0" rIns="0" bIns="0" rtlCol="0" anchor="t"/>
-          <a:lstStyle/>
-          <a:p>
-            <a:pPr indent="0" marL="0">
-              <a:buNone/>
-            </a:pPr>
-            <a:r>
-              <a:rPr lang="en-US" sz="1200" dirty="0">
-                <a:solidFill>
-                  <a:srgbClr val="5B6B82"/>
-                </a:solidFill>
-                <a:latin typeface="Calibri" pitchFamily="34" charset="0"/>
-                <a:ea typeface="Calibri" pitchFamily="34" charset="-122"/>
-                <a:cs typeface="Calibri" pitchFamily="34" charset="-120"/>
-              </a:rPr>
-              <a:t>SIM and IMEI records</a:t>
-            </a:r>
-            <a:endParaRPr lang="en-US" sz="1200" dirty="0"/>
-          </a:p>
-        </p:txBody>
-      </p:sp>
-      <p:sp>
-        <p:nvSpPr>
-          <p:cNvPr id="14" name="Shape 11"/>
-          <p:cNvSpPr/>
-          <p:nvPr/>
-        </p:nvSpPr>
-        <p:spPr>
-          <a:xfrm>
-            <a:off x="4846320" y="2971800"/>
-            <a:ext cx="1783080" cy="1280160"/>
-          </a:xfrm>
-          <a:prstGeom prst="roundRect">
-            <a:avLst>
-              <a:gd name="adj" fmla="val 7143"/>
-            </a:avLst>
-          </a:prstGeom>
-          <a:solidFill>
-            <a:srgbClr val="FFFFFF"/>
-          </a:solidFill>
-          <a:ln w="12700">
-            <a:solidFill>
-              <a:srgbClr val="FFFFFF"/>
-            </a:solidFill>
-            <a:prstDash val="solid"/>
-          </a:ln>
-          <a:effectLst>
-            <a:outerShdw sx="100000" sy="100000" kx="0" ky="0" algn="bl" rotWithShape="0" blurRad="101600" dist="25400" dir="5400000">
-              <a:srgbClr val="000000">
-                <a:alpha val="12000"/>
-              </a:srgbClr>
-            </a:outerShdw>
-          </a:effectLst>
-        </p:spPr>
-      </p:sp>
-      <p:sp>
-        <p:nvSpPr>
-          <p:cNvPr id="15" name="Text 12"/>
-          <p:cNvSpPr txBox="1"/>
-          <p:nvPr/>
-        </p:nvSpPr>
-        <p:spPr>
-          <a:xfrm>
-            <a:off x="4983480" y="3200400"/>
-            <a:ext cx="1554480" cy="457200"/>
-          </a:xfrm>
-          <a:prstGeom prst="rect">
-            <a:avLst/>
-          </a:prstGeom>
-          <a:noFill/>
-          <a:ln/>
-        </p:spPr>
-        <p:txBody>
-          <a:bodyPr wrap="square" lIns="0" tIns="0" rIns="0" bIns="0" rtlCol="0" anchor="t"/>
-          <a:lstStyle/>
-          <a:p>
-            <a:pPr indent="0" marL="0">
-              <a:buNone/>
-            </a:pPr>
-            <a:r>
-              <a:rPr lang="en-US" sz="1600" b="1" dirty="0">
-                <a:solidFill>
-                  <a:srgbClr val="0B1F3A"/>
-                </a:solidFill>
-                <a:latin typeface="Cambria" pitchFamily="34" charset="0"/>
-                <a:ea typeface="Cambria" pitchFamily="34" charset="-122"/>
-                <a:cs typeface="Cambria" pitchFamily="34" charset="-120"/>
-              </a:rPr>
-              <a:t>Bank requests</a:t>
-            </a:r>
-            <a:endParaRPr lang="en-US" sz="1600" dirty="0"/>
-          </a:p>
-        </p:txBody>
-      </p:sp>
-      <p:sp>
-        <p:nvSpPr>
-          <p:cNvPr id="16" name="Text 13"/>
-          <p:cNvSpPr txBox="1"/>
-          <p:nvPr/>
-        </p:nvSpPr>
-        <p:spPr>
-          <a:xfrm>
-            <a:off x="4983480" y="3749040"/>
-            <a:ext cx="1554480" cy="411480"/>
-          </a:xfrm>
-          <a:prstGeom prst="rect">
-            <a:avLst/>
-          </a:prstGeom>
-          <a:noFill/>
-          <a:ln/>
-        </p:spPr>
-        <p:txBody>
-          <a:bodyPr wrap="square" lIns="0" tIns="0" rIns="0" bIns="0" rtlCol="0" anchor="t"/>
-          <a:lstStyle/>
-          <a:p>
-            <a:pPr indent="0" marL="0">
-              <a:buNone/>
-            </a:pPr>
-            <a:r>
-              <a:rPr lang="en-US" sz="1200" dirty="0">
-                <a:solidFill>
-                  <a:srgbClr val="5B6B82"/>
-                </a:solidFill>
-                <a:latin typeface="Calibri" pitchFamily="34" charset="0"/>
-                <a:ea typeface="Calibri" pitchFamily="34" charset="-122"/>
-                <a:cs typeface="Calibri" pitchFamily="34" charset="-120"/>
-              </a:rPr>
-              <a:t>Statements and KYC</a:t>
-            </a:r>
-            <a:endParaRPr lang="en-US" sz="1200" dirty="0"/>
-          </a:p>
-        </p:txBody>
-      </p:sp>
-      <p:sp>
-        <p:nvSpPr>
-          <p:cNvPr id="17" name="Shape 14"/>
-          <p:cNvSpPr/>
-          <p:nvPr/>
-        </p:nvSpPr>
-        <p:spPr>
-          <a:xfrm>
-            <a:off x="6766560" y="2971800"/>
-            <a:ext cx="1783080" cy="1280160"/>
-          </a:xfrm>
-          <a:prstGeom prst="roundRect">
-            <a:avLst>
-              <a:gd name="adj" fmla="val 7143"/>
-            </a:avLst>
-          </a:prstGeom>
-          <a:solidFill>
-            <a:srgbClr val="FFFFFF"/>
-          </a:solidFill>
-          <a:ln w="12700">
-            <a:solidFill>
-              <a:srgbClr val="FFFFFF"/>
-            </a:solidFill>
-            <a:prstDash val="solid"/>
-          </a:ln>
-          <a:effectLst>
-            <a:outerShdw sx="100000" sy="100000" kx="0" ky="0" algn="bl" rotWithShape="0" blurRad="101600" dist="25400" dir="5400000">
-              <a:srgbClr val="000000">
-                <a:alpha val="12000"/>
-              </a:srgbClr>
-            </a:outerShdw>
-          </a:effectLst>
-        </p:spPr>
-      </p:sp>
-      <p:sp>
-        <p:nvSpPr>
-          <p:cNvPr id="18" name="Text 15"/>
-          <p:cNvSpPr txBox="1"/>
-          <p:nvPr/>
-        </p:nvSpPr>
-        <p:spPr>
-          <a:xfrm>
-            <a:off x="6903720" y="3200400"/>
-            <a:ext cx="1554480" cy="457200"/>
-          </a:xfrm>
-          <a:prstGeom prst="rect">
-            <a:avLst/>
-          </a:prstGeom>
-          <a:noFill/>
-          <a:ln/>
-        </p:spPr>
-        <p:txBody>
-          <a:bodyPr wrap="square" lIns="0" tIns="0" rIns="0" bIns="0" rtlCol="0" anchor="t"/>
-          <a:lstStyle/>
-          <a:p>
-            <a:pPr indent="0" marL="0">
-              <a:buNone/>
-            </a:pPr>
-            <a:r>
-              <a:rPr lang="en-US" sz="1600" b="1" dirty="0">
-                <a:solidFill>
-                  <a:srgbClr val="0B1F3A"/>
-                </a:solidFill>
-                <a:latin typeface="Cambria" pitchFamily="34" charset="0"/>
-                <a:ea typeface="Cambria" pitchFamily="34" charset="-122"/>
-                <a:cs typeface="Cambria" pitchFamily="34" charset="-120"/>
-              </a:rPr>
-              <a:t>Field verification</a:t>
-            </a:r>
-            <a:endParaRPr lang="en-US" sz="1600" dirty="0"/>
-          </a:p>
-        </p:txBody>
-      </p:sp>
-      <p:sp>
-        <p:nvSpPr>
-          <p:cNvPr id="19" name="Text 16"/>
-          <p:cNvSpPr txBox="1"/>
-          <p:nvPr/>
-        </p:nvSpPr>
-        <p:spPr>
-          <a:xfrm>
-            <a:off x="6903720" y="3749040"/>
-            <a:ext cx="1554480" cy="411480"/>
-          </a:xfrm>
-          <a:prstGeom prst="rect">
-            <a:avLst/>
-          </a:prstGeom>
-          <a:noFill/>
-          <a:ln/>
-        </p:spPr>
-        <p:txBody>
-          <a:bodyPr wrap="square" lIns="0" tIns="0" rIns="0" bIns="0" rtlCol="0" anchor="t"/>
-          <a:lstStyle/>
-          <a:p>
-            <a:pPr indent="0" marL="0">
-              <a:buNone/>
-            </a:pPr>
-            <a:r>
-              <a:rPr lang="en-US" sz="1200" dirty="0">
-                <a:solidFill>
-                  <a:srgbClr val="5B6B82"/>
-                </a:solidFill>
-                <a:latin typeface="Calibri" pitchFamily="34" charset="0"/>
-                <a:ea typeface="Calibri" pitchFamily="34" charset="-122"/>
-                <a:cs typeface="Calibri" pitchFamily="34" charset="-120"/>
-              </a:rPr>
-              <a:t>Locations and devices</a:t>
-            </a:r>
-            <a:endParaRPr lang="en-US" sz="1200" dirty="0"/>
-          </a:p>
-        </p:txBody>
-      </p:sp>
-      <p:sp>
-        <p:nvSpPr>
-          <p:cNvPr id="20" name="Text 17"/>
-          <p:cNvSpPr txBox="1"/>
-          <p:nvPr/>
-        </p:nvSpPr>
-        <p:spPr>
-          <a:xfrm>
-            <a:off x="548640" y="4480560"/>
-            <a:ext cx="8046720" cy="365760"/>
-          </a:xfrm>
-          <a:prstGeom prst="rect">
-            <a:avLst/>
-          </a:prstGeom>
-          <a:noFill/>
-          <a:ln/>
-        </p:spPr>
-        <p:txBody>
-          <a:bodyPr wrap="square" lIns="0" tIns="0" rIns="0" bIns="0" rtlCol="0" anchor="t"/>
-          <a:lstStyle/>
-          <a:p>
-            <a:pPr indent="0" marL="0">
-              <a:buNone/>
-            </a:pPr>
-            <a:r>
-              <a:rPr lang="en-US" sz="1200" i="1" dirty="0">
-                <a:solidFill>
-                  <a:srgbClr val="5B6B82"/>
-                </a:solidFill>
-                <a:latin typeface="Calibri" pitchFamily="34" charset="0"/>
-                <a:ea typeface="Calibri" pitchFamily="34" charset="-122"/>
-                <a:cs typeface="Calibri" pitchFamily="34" charset="-120"/>
-              </a:rPr>
-              <a:t>Weeks of manual tracing, reduced to minutes. Legal mappings to be verified with the legal officer.</a:t>
-            </a:r>
-            <a:endParaRPr lang="en-US" sz="1200" dirty="0"/>
+            <a:endParaRPr lang="en-US" sz="1700" dirty="0"/>
           </a:p>
         </p:txBody>
       </p:sp>
